--- a/Schools_ML_Track/camp_2026/slides/DA/DA10.pptx
+++ b/Schools_ML_Track/camp_2026/slides/DA/DA10.pptx
@@ -129,7 +129,7 @@
   <p:extLst>
     <p:ext uri="{521415D9-36F7-43E2-AB2F-B90AF26B5E84}">
       <p14:sectionLst xmlns:p14="http://schemas.microsoft.com/office/powerpoint/2010/main">
-        <p14:section name="Opening" id="{45056fe3-6c03-d8ae-29ee-4aaaa6a892c1}">
+        <p14:section name="Opening" id="{381cf163-4c1e-bb98-6f65-4b2e44fcc14f}">
           <p14:sldIdLst>
             <p14:sldId id="256"/>
             <p14:sldId id="257"/>
@@ -140,7 +140,7 @@
             <p14:sldId id="262"/>
           </p14:sldIdLst>
         </p14:section>
-        <p14:section name="Block A" id="{59a5015f-c52a-0deb-0994-ede4dac7f7b5}">
+        <p14:section name="Block A" id="{29cf806a-2f5c-1cea-2327-92aeb0a9a7c5}">
           <p14:sldIdLst>
             <p14:sldId id="263"/>
             <p14:sldId id="264"/>
@@ -150,15 +150,15 @@
             <p14:sldId id="269"/>
           </p14:sldIdLst>
         </p14:section>
-        <p14:section name="Break" id="{acd261f5-0f5a-f7c5-2a4e-cbfdfde81ff1}">
+        <p14:section name="Break" id="{0a9b625c-9b02-0e3b-664a-b1567ea31d8f}">
           <p14:sldIdLst>
             <p14:sldId id="267"/>
           </p14:sldIdLst>
         </p14:section>
-        <p14:section name="Block A" id="{efb6f254-4977-b321-3a14-7f8b74195c6d}">
+        <p14:section name="Block A" id="{7dc016de-e664-2197-1a10-cc4cb265820e}">
           <p14:sldIdLst/>
         </p14:section>
-        <p14:section name="Block B" id="{83942a50-61f5-e16a-cc0b-bf03177de90d}">
+        <p14:section name="Block B" id="{dd97abaa-39c9-5793-dfa9-7ae0507b9b5a}">
           <p14:sldIdLst>
             <p14:sldId id="270"/>
             <p14:sldId id="271"/>
@@ -168,7 +168,7 @@
             <p14:sldId id="275"/>
           </p14:sldIdLst>
         </p14:section>
-        <p14:section name="Make and close" id="{706ef7f0-1443-6239-de48-9898f5264cb5}">
+        <p14:section name="Make and close" id="{9e8a35da-bab6-2faa-831f-aa44e372f2a8}">
           <p14:sldIdLst>
             <p14:sldId id="276"/>
             <p14:sldId id="277"/>

--- a/Schools_ML_Track/camp_2026/slides/DA/DA10.pptx
+++ b/Schools_ML_Track/camp_2026/slides/DA/DA10.pptx
@@ -129,7 +129,7 @@
   <p:extLst>
     <p:ext uri="{521415D9-36F7-43E2-AB2F-B90AF26B5E84}">
       <p14:sectionLst xmlns:p14="http://schemas.microsoft.com/office/powerpoint/2010/main">
-        <p14:section name="Opening" id="{381cf163-4c1e-bb98-6f65-4b2e44fcc14f}">
+        <p14:section name="Opening" id="{2a094a73-5b19-8456-3c98-3f0a4d48f392}">
           <p14:sldIdLst>
             <p14:sldId id="256"/>
             <p14:sldId id="257"/>
@@ -140,7 +140,7 @@
             <p14:sldId id="262"/>
           </p14:sldIdLst>
         </p14:section>
-        <p14:section name="Block A" id="{29cf806a-2f5c-1cea-2327-92aeb0a9a7c5}">
+        <p14:section name="Block A" id="{21330d79-8f20-e2fa-085b-404ef0d2b9aa}">
           <p14:sldIdLst>
             <p14:sldId id="263"/>
             <p14:sldId id="264"/>
@@ -150,15 +150,15 @@
             <p14:sldId id="269"/>
           </p14:sldIdLst>
         </p14:section>
-        <p14:section name="Break" id="{0a9b625c-9b02-0e3b-664a-b1567ea31d8f}">
+        <p14:section name="Break" id="{f8ad42ba-aecd-d5d3-1c30-538b36132525}">
           <p14:sldIdLst>
             <p14:sldId id="267"/>
           </p14:sldIdLst>
         </p14:section>
-        <p14:section name="Block A" id="{7dc016de-e664-2197-1a10-cc4cb265820e}">
+        <p14:section name="Block A" id="{9818b264-9aee-7d0e-ad94-9eed6c9279ae}">
           <p14:sldIdLst/>
         </p14:section>
-        <p14:section name="Block B" id="{dd97abaa-39c9-5793-dfa9-7ae0507b9b5a}">
+        <p14:section name="Block B" id="{9b2437d0-11e1-54fb-55da-22e3fe333ba9}">
           <p14:sldIdLst>
             <p14:sldId id="270"/>
             <p14:sldId id="271"/>
@@ -168,7 +168,7 @@
             <p14:sldId id="275"/>
           </p14:sldIdLst>
         </p14:section>
-        <p14:section name="Make and close" id="{9e8a35da-bab6-2faa-831f-aa44e372f2a8}">
+        <p14:section name="Make and close" id="{f29f2202-3925-6e3e-57cc-2ef81b134c3c}">
           <p14:sldIdLst>
             <p14:sldId id="276"/>
             <p14:sldId id="277"/>
@@ -1117,7 +1117,8 @@
           <a:p>
             <a:r>
               <a:rPr lang="en-US" dirty="0"/>
-              <a:t>Read this first part of the code with me before we run anything. ['sunrise_sales_raw.csv is the Sunrise sales as an untidy export.', 'Count the problems.', 'to_csv saves a table to a file.', 'index=False stops pandas adding an extra column of row numbers.']</a:t>
+              <a:t>sunrise_sales_raw.csv is the Sunrise sales as an untidy export. Count the problems.
+Your turn to guess. Predict how many duplicate rows the file holds. The clean version has 1513 sales. Guess on paper first. Surprises are useful.</a:t>
             </a:r>
             <a:endParaRPr lang="en-US" dirty="0"/>
           </a:p>
@@ -1205,8 +1206,7 @@
           <a:p>
             <a:r>
               <a:rPr lang="en-US" dirty="0"/>
-              <a:t>sunrise_sales_raw.csv is the Sunrise sales as an untidy export. Count the problems.
-Your turn to guess. Predict how many duplicate rows the file holds. The clean version has 1513 sales. Guess on paper first. Surprises are useful.</a:t>
+              <a:t>Here is the rest of the code. Read it through once. Then write your guess on paper before we run anything.</a:t>
             </a:r>
             <a:endParaRPr lang="en-US" dirty="0"/>
           </a:p>
@@ -3287,7 +3287,24 @@
                 <a:ea typeface="Lato" pitchFamily="34" charset="-122"/>
                 <a:cs typeface="Lato" pitchFamily="34" charset="-120"/>
               </a:rPr>
-              <a:t>Cleaning without hiding evidence</a:t>
+              <a:t>Cleaning without</a:t>
+            </a:r>
+            <a:endParaRPr lang="en-US" sz="5600" dirty="0"/>
+          </a:p>
+          <a:p>
+            <a:pPr algn="l" indent="0" marL="0">
+              <a:buNone/>
+            </a:pPr>
+            <a:r>
+              <a:rPr lang="en-US" sz="5600" b="1" dirty="0">
+                <a:solidFill>
+                  <a:srgbClr val="FFFFFF"/>
+                </a:solidFill>
+                <a:latin typeface="Lato" pitchFamily="34" charset="0"/>
+                <a:ea typeface="Lato" pitchFamily="34" charset="-122"/>
+                <a:cs typeface="Lato" pitchFamily="34" charset="-120"/>
+              </a:rPr>
+              <a:t>hiding evidence</a:t>
             </a:r>
             <a:endParaRPr lang="en-US" sz="5600" dirty="0"/>
           </a:p>
@@ -4689,7 +4706,7 @@
                 <a:ea typeface="Lato" pitchFamily="34" charset="-122"/>
                 <a:cs typeface="Lato" pitchFamily="34" charset="-120"/>
               </a:rPr>
-              <a:t>Read the first part of the code. 4 lines. Say what each one does.</a:t>
+              <a:t>Predict how many duplicate rows the file holds. The clean version has 1513 sales.</a:t>
             </a:r>
             <a:endParaRPr lang="en-US" sz="2400" dirty="0"/>
           </a:p>
@@ -4712,7 +4729,7 @@
                 <a:ea typeface="Lato" pitchFamily="34" charset="-122"/>
                 <a:cs typeface="Lato" pitchFamily="34" charset="-120"/>
               </a:rPr>
-              <a:t>The second part comes next.</a:t>
+              <a:t>The rest of the code is on the next slide.</a:t>
             </a:r>
             <a:endParaRPr lang="en-US" sz="2400" dirty="0"/>
           </a:p>
@@ -5445,7 +5462,7 @@
                 <a:ea typeface="Lato" pitchFamily="34" charset="-122"/>
                 <a:cs typeface="Lato" pitchFamily="34" charset="-120"/>
               </a:rPr>
-              <a:t>Predict how many duplicate rows the file holds. The clean version has 1513 sales.</a:t>
+              <a:t>This is the rest of the code. Keep your guess in mind.</a:t>
             </a:r>
             <a:endParaRPr lang="en-US" sz="2400" dirty="0"/>
           </a:p>
@@ -6799,15 +6816,15 @@
           <a:p>
             <a:pPr algn="l" indent="0" marL="0">
               <a:lnSpc>
-                <a:spcPts val="3240"/>
+                <a:spcPts val="3120"/>
               </a:lnSpc>
               <a:spcAft>
-                <a:spcPts val="2520"/>
+                <a:spcPts val="2020"/>
               </a:spcAft>
               <a:buNone/>
             </a:pPr>
             <a:r>
-              <a:rPr lang="en-US" sz="2700" dirty="0">
+              <a:rPr lang="en-US" sz="2600" dirty="0">
                 <a:solidFill>
                   <a:srgbClr val="111111"/>
                 </a:solidFill>
@@ -6815,22 +6832,22 @@
                 <a:ea typeface="Lato" pitchFamily="34" charset="-122"/>
                 <a:cs typeface="Lato" pitchFamily="34" charset="-120"/>
               </a:rPr>
-              <a:t>Write a cleaning log for the four-row table in Block A: four raw rows, one duplicate removed, one price still missing. Save it as a CSV with to_csv. Write one sentence on why replacing the missing price with zero would change what the data says.</a:t>
-            </a:r>
-            <a:endParaRPr lang="en-US" sz="2700" dirty="0"/>
-          </a:p>
-          <a:p>
-            <a:pPr algn="l" indent="0" marL="0">
-              <a:lnSpc>
-                <a:spcPts val="3240"/>
+              <a:t>Write a cleaning log for the four-row table in Block A: four raw rows, one duplicate removed, one price still missing.</a:t>
+            </a:r>
+            <a:endParaRPr lang="en-US" sz="2600" dirty="0"/>
+          </a:p>
+          <a:p>
+            <a:pPr algn="l" indent="0" marL="0">
+              <a:lnSpc>
+                <a:spcPts val="3120"/>
               </a:lnSpc>
               <a:spcAft>
-                <a:spcPts val="2520"/>
+                <a:spcPts val="2020"/>
               </a:spcAft>
               <a:buNone/>
             </a:pPr>
             <a:r>
-              <a:rPr lang="en-US" sz="2700" dirty="0">
+              <a:rPr lang="en-US" sz="2600" dirty="0">
                 <a:solidFill>
                   <a:srgbClr val="111111"/>
                 </a:solidFill>
@@ -6838,9 +6855,55 @@
                 <a:ea typeface="Lato" pitchFamily="34" charset="-122"/>
                 <a:cs typeface="Lato" pitchFamily="34" charset="-120"/>
               </a:rPr>
-              <a:t>Save it as DA10. Write two sentences: what you changed and how you checked it.</a:t>
-            </a:r>
-            <a:endParaRPr lang="en-US" sz="2700" dirty="0"/>
+              <a:t>Save it as a CSV with to_csv.</a:t>
+            </a:r>
+            <a:endParaRPr lang="en-US" sz="2600" dirty="0"/>
+          </a:p>
+          <a:p>
+            <a:pPr algn="l" indent="0" marL="0">
+              <a:lnSpc>
+                <a:spcPts val="3120"/>
+              </a:lnSpc>
+              <a:spcAft>
+                <a:spcPts val="2020"/>
+              </a:spcAft>
+              <a:buNone/>
+            </a:pPr>
+            <a:r>
+              <a:rPr lang="en-US" sz="2600" dirty="0">
+                <a:solidFill>
+                  <a:srgbClr val="111111"/>
+                </a:solidFill>
+                <a:latin typeface="Lato" pitchFamily="34" charset="0"/>
+                <a:ea typeface="Lato" pitchFamily="34" charset="-122"/>
+                <a:cs typeface="Lato" pitchFamily="34" charset="-120"/>
+              </a:rPr>
+              <a:t>Write one sentence on why replacing the missing price with zero would change what the data says.</a:t>
+            </a:r>
+            <a:endParaRPr lang="en-US" sz="2600" dirty="0"/>
+          </a:p>
+          <a:p>
+            <a:pPr algn="l" indent="0" marL="0">
+              <a:lnSpc>
+                <a:spcPts val="3120"/>
+              </a:lnSpc>
+              <a:spcAft>
+                <a:spcPts val="2020"/>
+              </a:spcAft>
+              <a:buNone/>
+            </a:pPr>
+            <a:r>
+              <a:rPr lang="en-US" sz="2600" dirty="0">
+                <a:solidFill>
+                  <a:srgbClr val="111111"/>
+                </a:solidFill>
+                <a:latin typeface="Lato" pitchFamily="34" charset="0"/>
+                <a:ea typeface="Lato" pitchFamily="34" charset="-122"/>
+                <a:cs typeface="Lato" pitchFamily="34" charset="-120"/>
+              </a:rPr>
+              <a:t>Write two sentences: what you changed and how you checked it.</a:t>
+            </a:r>
+            <a:endParaRPr lang="en-US" sz="2600" dirty="0"/>
           </a:p>
         </p:txBody>
       </p:sp>
@@ -9567,11 +9630,11 @@
         <p:spPr>
           <a:xfrm>
             <a:off x="640080" y="1645920"/>
-            <a:ext cx="10881360" cy="3212592"/>
+            <a:ext cx="10881360" cy="2122932"/>
           </a:xfrm>
           <a:prstGeom prst="roundRect">
             <a:avLst>
-              <a:gd name="adj" fmla="val 2277"/>
+              <a:gd name="adj" fmla="val 3446"/>
             </a:avLst>
           </a:prstGeom>
           <a:solidFill>
@@ -9589,7 +9652,7 @@
         <p:spPr>
           <a:xfrm>
             <a:off x="841248" y="1847088"/>
-            <a:ext cx="10479024" cy="2810256"/>
+            <a:ext cx="10479024" cy="1720596"/>
           </a:xfrm>
           <a:prstGeom prst="rect">
             <a:avLst/>
@@ -9603,12 +9666,12 @@
           <a:p>
             <a:pPr algn="l" indent="0" marL="0">
               <a:lnSpc>
-                <a:spcPts val="2730"/>
-              </a:lnSpc>
-              <a:buNone/>
-            </a:pPr>
-            <a:r>
-              <a:rPr lang="en-US" sz="2100" b="1" dirty="0">
+                <a:spcPts val="2210"/>
+              </a:lnSpc>
+              <a:buNone/>
+            </a:pPr>
+            <a:r>
+              <a:rPr lang="en-US" sz="1700" b="1" dirty="0">
                 <a:solidFill>
                   <a:srgbClr val="FFFFFF"/>
                 </a:solidFill>
@@ -9620,12 +9683,12 @@
             </a:r>
             <a:pPr algn="l" indent="0" marL="0">
               <a:lnSpc>
-                <a:spcPts val="2730"/>
-              </a:lnSpc>
-              <a:buNone/>
-            </a:pPr>
-            <a:r>
-              <a:rPr lang="en-US" sz="2100" dirty="0">
+                <a:spcPts val="2210"/>
+              </a:lnSpc>
+              <a:buNone/>
+            </a:pPr>
+            <a:r>
+              <a:rPr lang="en-US" sz="1700" dirty="0">
                 <a:solidFill>
                   <a:srgbClr val="FFFFFF"/>
                 </a:solidFill>
@@ -9637,12 +9700,12 @@
             </a:r>
             <a:pPr algn="l" indent="0" marL="0">
               <a:lnSpc>
-                <a:spcPts val="2730"/>
-              </a:lnSpc>
-              <a:buNone/>
-            </a:pPr>
-            <a:r>
-              <a:rPr lang="en-US" sz="2100" b="1" dirty="0">
+                <a:spcPts val="2210"/>
+              </a:lnSpc>
+              <a:buNone/>
+            </a:pPr>
+            <a:r>
+              <a:rPr lang="en-US" sz="1700" b="1" dirty="0">
                 <a:solidFill>
                   <a:srgbClr val="FFFFFF"/>
                 </a:solidFill>
@@ -9654,12 +9717,12 @@
             </a:r>
             <a:pPr algn="l" indent="0" marL="0">
               <a:lnSpc>
-                <a:spcPts val="2730"/>
-              </a:lnSpc>
-              <a:buNone/>
-            </a:pPr>
-            <a:r>
-              <a:rPr lang="en-US" sz="2100" dirty="0">
+                <a:spcPts val="2210"/>
+              </a:lnSpc>
+              <a:buNone/>
+            </a:pPr>
+            <a:r>
+              <a:rPr lang="en-US" sz="1700" dirty="0">
                 <a:solidFill>
                   <a:srgbClr val="FFFFFF"/>
                 </a:solidFill>
@@ -9669,17 +9732,17 @@
               </a:rPr>
               <a:t> pd</a:t>
             </a:r>
-            <a:endParaRPr lang="en-US" sz="2100" dirty="0"/>
-          </a:p>
-          <a:p>
-            <a:pPr algn="l" indent="0" marL="0">
-              <a:lnSpc>
-                <a:spcPts val="2730"/>
-              </a:lnSpc>
-              <a:buNone/>
-            </a:pPr>
-            <a:r>
-              <a:rPr lang="en-US" sz="2100" dirty="0">
+            <a:endParaRPr lang="en-US" sz="1700" dirty="0"/>
+          </a:p>
+          <a:p>
+            <a:pPr algn="l" indent="0" marL="0">
+              <a:lnSpc>
+                <a:spcPts val="2210"/>
+              </a:lnSpc>
+              <a:buNone/>
+            </a:pPr>
+            <a:r>
+              <a:rPr lang="en-US" sz="1700" dirty="0">
                 <a:solidFill>
                   <a:srgbClr val="FFFFFF"/>
                 </a:solidFill>
@@ -9687,87 +9750,84 @@
                 <a:ea typeface="Courier New" pitchFamily="34" charset="-122"/>
                 <a:cs typeface="Courier New" pitchFamily="34" charset="-120"/>
               </a:rPr>
-              <a:t>raw = pd.DataFrame(</a:t>
-            </a:r>
-            <a:endParaRPr lang="en-US" sz="2100" dirty="0"/>
-          </a:p>
-          <a:p>
-            <a:pPr algn="l" indent="0" marL="0">
-              <a:lnSpc>
-                <a:spcPts val="2730"/>
-              </a:lnSpc>
-              <a:buNone/>
-            </a:pPr>
-            <a:r>
-              <a:rPr lang="en-US" sz="2100" dirty="0">
-                <a:solidFill>
-                  <a:srgbClr val="FFFFFF"/>
+              <a:t>raw = pd.DataFrame({</a:t>
+            </a:r>
+            <a:pPr algn="l" indent="0" marL="0">
+              <a:lnSpc>
+                <a:spcPts val="2210"/>
+              </a:lnSpc>
+              <a:buNone/>
+            </a:pPr>
+            <a:r>
+              <a:rPr lang="en-US" sz="1700" dirty="0">
+                <a:solidFill>
+                  <a:srgbClr val="E0BE36"/>
                 </a:solidFill>
                 <a:latin typeface="Courier New" pitchFamily="34" charset="0"/>
                 <a:ea typeface="Courier New" pitchFamily="34" charset="-122"/>
                 <a:cs typeface="Courier New" pitchFamily="34" charset="-120"/>
               </a:rPr>
-              <a:t>    {</a:t>
-            </a:r>
-            <a:pPr algn="l" indent="0" marL="0">
-              <a:lnSpc>
-                <a:spcPts val="2730"/>
-              </a:lnSpc>
-              <a:buNone/>
-            </a:pPr>
-            <a:r>
-              <a:rPr lang="en-US" sz="2100" dirty="0">
-                <a:solidFill>
-                  <a:srgbClr val="E0BE36"/>
+              <a:t>"id"</a:t>
+            </a:r>
+            <a:pPr algn="l" indent="0" marL="0">
+              <a:lnSpc>
+                <a:spcPts val="2210"/>
+              </a:lnSpc>
+              <a:buNone/>
+            </a:pPr>
+            <a:r>
+              <a:rPr lang="en-US" sz="1700" dirty="0">
+                <a:solidFill>
+                  <a:srgbClr val="FFFFFF"/>
                 </a:solidFill>
                 <a:latin typeface="Courier New" pitchFamily="34" charset="0"/>
                 <a:ea typeface="Courier New" pitchFamily="34" charset="-122"/>
                 <a:cs typeface="Courier New" pitchFamily="34" charset="-120"/>
               </a:rPr>
-              <a:t>"id"</a:t>
-            </a:r>
-            <a:pPr algn="l" indent="0" marL="0">
-              <a:lnSpc>
-                <a:spcPts val="2730"/>
-              </a:lnSpc>
-              <a:buNone/>
-            </a:pPr>
-            <a:r>
-              <a:rPr lang="en-US" sz="2100" dirty="0">
-                <a:solidFill>
-                  <a:srgbClr val="FFFFFF"/>
+              <a:t>: [1, 2, 2, 3], </a:t>
+            </a:r>
+            <a:pPr algn="l" indent="0" marL="0">
+              <a:lnSpc>
+                <a:spcPts val="2210"/>
+              </a:lnSpc>
+              <a:buNone/>
+            </a:pPr>
+            <a:r>
+              <a:rPr lang="en-US" sz="1700" dirty="0">
+                <a:solidFill>
+                  <a:srgbClr val="E0BE36"/>
                 </a:solidFill>
                 <a:latin typeface="Courier New" pitchFamily="34" charset="0"/>
                 <a:ea typeface="Courier New" pitchFamily="34" charset="-122"/>
                 <a:cs typeface="Courier New" pitchFamily="34" charset="-120"/>
               </a:rPr>
-              <a:t>: [1, 2, 2, 3], </a:t>
-            </a:r>
-            <a:pPr algn="l" indent="0" marL="0">
-              <a:lnSpc>
-                <a:spcPts val="2730"/>
-              </a:lnSpc>
-              <a:buNone/>
-            </a:pPr>
-            <a:r>
-              <a:rPr lang="en-US" sz="2100" dirty="0">
-                <a:solidFill>
-                  <a:srgbClr val="E0BE36"/>
+              <a:t>"price"</a:t>
+            </a:r>
+            <a:pPr algn="l" indent="0" marL="0">
+              <a:lnSpc>
+                <a:spcPts val="2210"/>
+              </a:lnSpc>
+              <a:buNone/>
+            </a:pPr>
+            <a:r>
+              <a:rPr lang="en-US" sz="1700" dirty="0">
+                <a:solidFill>
+                  <a:srgbClr val="FFFFFF"/>
                 </a:solidFill>
                 <a:latin typeface="Courier New" pitchFamily="34" charset="0"/>
                 <a:ea typeface="Courier New" pitchFamily="34" charset="-122"/>
                 <a:cs typeface="Courier New" pitchFamily="34" charset="-120"/>
               </a:rPr>
-              <a:t>"price"</a:t>
-            </a:r>
-            <a:pPr algn="l" indent="0" marL="0">
-              <a:lnSpc>
-                <a:spcPts val="2730"/>
-              </a:lnSpc>
-              <a:buNone/>
-            </a:pPr>
-            <a:r>
-              <a:rPr lang="en-US" sz="2100" dirty="0">
+              <a:t>: [1000, </a:t>
+            </a:r>
+            <a:pPr algn="l" indent="0" marL="0">
+              <a:lnSpc>
+                <a:spcPts val="2210"/>
+              </a:lnSpc>
+              <a:buNone/>
+            </a:pPr>
+            <a:r>
+              <a:rPr lang="en-US" sz="1700" b="1" dirty="0">
                 <a:solidFill>
                   <a:srgbClr val="FFFFFF"/>
                 </a:solidFill>
@@ -9775,16 +9835,16 @@
                 <a:ea typeface="Courier New" pitchFamily="34" charset="-122"/>
                 <a:cs typeface="Courier New" pitchFamily="34" charset="-120"/>
               </a:rPr>
-              <a:t>: [1000, </a:t>
-            </a:r>
-            <a:pPr algn="l" indent="0" marL="0">
-              <a:lnSpc>
-                <a:spcPts val="2730"/>
-              </a:lnSpc>
-              <a:buNone/>
-            </a:pPr>
-            <a:r>
-              <a:rPr lang="en-US" sz="2100" b="1" dirty="0">
+              <a:t>None</a:t>
+            </a:r>
+            <a:pPr algn="l" indent="0" marL="0">
+              <a:lnSpc>
+                <a:spcPts val="2210"/>
+              </a:lnSpc>
+              <a:buNone/>
+            </a:pPr>
+            <a:r>
+              <a:rPr lang="en-US" sz="1700" dirty="0">
                 <a:solidFill>
                   <a:srgbClr val="FFFFFF"/>
                 </a:solidFill>
@@ -9792,16 +9852,16 @@
                 <a:ea typeface="Courier New" pitchFamily="34" charset="-122"/>
                 <a:cs typeface="Courier New" pitchFamily="34" charset="-120"/>
               </a:rPr>
-              <a:t>None</a:t>
-            </a:r>
-            <a:pPr algn="l" indent="0" marL="0">
-              <a:lnSpc>
-                <a:spcPts val="2730"/>
-              </a:lnSpc>
-              <a:buNone/>
-            </a:pPr>
-            <a:r>
-              <a:rPr lang="en-US" sz="2100" dirty="0">
+              <a:t>, </a:t>
+            </a:r>
+            <a:pPr algn="l" indent="0" marL="0">
+              <a:lnSpc>
+                <a:spcPts val="2210"/>
+              </a:lnSpc>
+              <a:buNone/>
+            </a:pPr>
+            <a:r>
+              <a:rPr lang="en-US" sz="1700" b="1" dirty="0">
                 <a:solidFill>
                   <a:srgbClr val="FFFFFF"/>
                 </a:solidFill>
@@ -9809,16 +9869,16 @@
                 <a:ea typeface="Courier New" pitchFamily="34" charset="-122"/>
                 <a:cs typeface="Courier New" pitchFamily="34" charset="-120"/>
               </a:rPr>
-              <a:t>, </a:t>
-            </a:r>
-            <a:pPr algn="l" indent="0" marL="0">
-              <a:lnSpc>
-                <a:spcPts val="2730"/>
-              </a:lnSpc>
-              <a:buNone/>
-            </a:pPr>
-            <a:r>
-              <a:rPr lang="en-US" sz="2100" b="1" dirty="0">
+              <a:t>None</a:t>
+            </a:r>
+            <a:pPr algn="l" indent="0" marL="0">
+              <a:lnSpc>
+                <a:spcPts val="2210"/>
+              </a:lnSpc>
+              <a:buNone/>
+            </a:pPr>
+            <a:r>
+              <a:rPr lang="en-US" sz="1700" dirty="0">
                 <a:solidFill>
                   <a:srgbClr val="FFFFFF"/>
                 </a:solidFill>
@@ -9826,16 +9886,19 @@
                 <a:ea typeface="Courier New" pitchFamily="34" charset="-122"/>
                 <a:cs typeface="Courier New" pitchFamily="34" charset="-120"/>
               </a:rPr>
-              <a:t>None</a:t>
-            </a:r>
-            <a:pPr algn="l" indent="0" marL="0">
-              <a:lnSpc>
-                <a:spcPts val="2730"/>
-              </a:lnSpc>
-              <a:buNone/>
-            </a:pPr>
-            <a:r>
-              <a:rPr lang="en-US" sz="2100" dirty="0">
+              <a:t>, 3000]})</a:t>
+            </a:r>
+            <a:endParaRPr lang="en-US" sz="1700" dirty="0"/>
+          </a:p>
+          <a:p>
+            <a:pPr algn="l" indent="0" marL="0">
+              <a:lnSpc>
+                <a:spcPts val="2210"/>
+              </a:lnSpc>
+              <a:buNone/>
+            </a:pPr>
+            <a:r>
+              <a:rPr lang="en-US" sz="1700" dirty="0">
                 <a:solidFill>
                   <a:srgbClr val="FFFFFF"/>
                 </a:solidFill>
@@ -9843,19 +9906,19 @@
                 <a:ea typeface="Courier New" pitchFamily="34" charset="-122"/>
                 <a:cs typeface="Courier New" pitchFamily="34" charset="-120"/>
               </a:rPr>
-              <a:t>, 3000]}</a:t>
-            </a:r>
-            <a:endParaRPr lang="en-US" sz="2100" dirty="0"/>
-          </a:p>
-          <a:p>
-            <a:pPr algn="l" indent="0" marL="0">
-              <a:lnSpc>
-                <a:spcPts val="2730"/>
-              </a:lnSpc>
-              <a:buNone/>
-            </a:pPr>
-            <a:r>
-              <a:rPr lang="en-US" sz="2100" dirty="0">
+              <a:t>clean = raw.drop_duplicates().copy()</a:t>
+            </a:r>
+            <a:endParaRPr lang="en-US" sz="1700" dirty="0"/>
+          </a:p>
+          <a:p>
+            <a:pPr algn="l" indent="0" marL="0">
+              <a:lnSpc>
+                <a:spcPts val="2210"/>
+              </a:lnSpc>
+              <a:buNone/>
+            </a:pPr>
+            <a:r>
+              <a:rPr lang="en-US" sz="1700" dirty="0">
                 <a:solidFill>
                   <a:srgbClr val="FFFFFF"/>
                 </a:solidFill>
@@ -9863,39 +9926,33 @@
                 <a:ea typeface="Courier New" pitchFamily="34" charset="-122"/>
                 <a:cs typeface="Courier New" pitchFamily="34" charset="-120"/>
               </a:rPr>
-              <a:t>)</a:t>
-            </a:r>
-            <a:endParaRPr lang="en-US" sz="2100" dirty="0"/>
-          </a:p>
-          <a:p>
-            <a:pPr algn="l" indent="0" marL="0">
-              <a:lnSpc>
-                <a:spcPts val="2730"/>
-              </a:lnSpc>
-              <a:buNone/>
-            </a:pPr>
-            <a:r>
-              <a:rPr lang="en-US" sz="2100" dirty="0">
-                <a:solidFill>
-                  <a:srgbClr val="FFFFFF"/>
+              <a:t>print(raw[</a:t>
+            </a:r>
+            <a:pPr algn="l" indent="0" marL="0">
+              <a:lnSpc>
+                <a:spcPts val="2210"/>
+              </a:lnSpc>
+              <a:buNone/>
+            </a:pPr>
+            <a:r>
+              <a:rPr lang="en-US" sz="1700" dirty="0">
+                <a:solidFill>
+                  <a:srgbClr val="E0BE36"/>
                 </a:solidFill>
                 <a:latin typeface="Courier New" pitchFamily="34" charset="0"/>
                 <a:ea typeface="Courier New" pitchFamily="34" charset="-122"/>
                 <a:cs typeface="Courier New" pitchFamily="34" charset="-120"/>
               </a:rPr>
-              <a:t>clean = raw.drop_duplicates().copy()</a:t>
-            </a:r>
-            <a:endParaRPr lang="en-US" sz="2100" dirty="0"/>
-          </a:p>
-          <a:p>
-            <a:pPr algn="l" indent="0" marL="0">
-              <a:lnSpc>
-                <a:spcPts val="2730"/>
-              </a:lnSpc>
-              <a:buNone/>
-            </a:pPr>
-            <a:r>
-              <a:rPr lang="en-US" sz="2100" dirty="0">
+              <a:t>"price"</a:t>
+            </a:r>
+            <a:pPr algn="l" indent="0" marL="0">
+              <a:lnSpc>
+                <a:spcPts val="2210"/>
+              </a:lnSpc>
+              <a:buNone/>
+            </a:pPr>
+            <a:r>
+              <a:rPr lang="en-US" sz="1700" dirty="0">
                 <a:solidFill>
                   <a:srgbClr val="FFFFFF"/>
                 </a:solidFill>
@@ -9903,33 +9960,39 @@
                 <a:ea typeface="Courier New" pitchFamily="34" charset="-122"/>
                 <a:cs typeface="Courier New" pitchFamily="34" charset="-120"/>
               </a:rPr>
-              <a:t>print(raw[</a:t>
-            </a:r>
-            <a:pPr algn="l" indent="0" marL="0">
-              <a:lnSpc>
-                <a:spcPts val="2730"/>
-              </a:lnSpc>
-              <a:buNone/>
-            </a:pPr>
-            <a:r>
-              <a:rPr lang="en-US" sz="2100" dirty="0">
-                <a:solidFill>
-                  <a:srgbClr val="E0BE36"/>
+              <a:t>].isna().sum())</a:t>
+            </a:r>
+            <a:endParaRPr lang="en-US" sz="1700" dirty="0"/>
+          </a:p>
+          <a:p>
+            <a:pPr algn="l" indent="0" marL="0">
+              <a:lnSpc>
+                <a:spcPts val="2210"/>
+              </a:lnSpc>
+              <a:buNone/>
+            </a:pPr>
+            <a:r>
+              <a:rPr lang="en-US" sz="1700" dirty="0">
+                <a:solidFill>
+                  <a:srgbClr val="FFFFFF"/>
                 </a:solidFill>
                 <a:latin typeface="Courier New" pitchFamily="34" charset="0"/>
                 <a:ea typeface="Courier New" pitchFamily="34" charset="-122"/>
                 <a:cs typeface="Courier New" pitchFamily="34" charset="-120"/>
               </a:rPr>
-              <a:t>"price"</a:t>
-            </a:r>
-            <a:pPr algn="l" indent="0" marL="0">
-              <a:lnSpc>
-                <a:spcPts val="2730"/>
-              </a:lnSpc>
-              <a:buNone/>
-            </a:pPr>
-            <a:r>
-              <a:rPr lang="en-US" sz="2100" dirty="0">
+              <a:t>print(len(clean))</a:t>
+            </a:r>
+            <a:endParaRPr lang="en-US" sz="1700" dirty="0"/>
+          </a:p>
+          <a:p>
+            <a:pPr algn="l" indent="0" marL="0">
+              <a:lnSpc>
+                <a:spcPts val="2210"/>
+              </a:lnSpc>
+              <a:buNone/>
+            </a:pPr>
+            <a:r>
+              <a:rPr lang="en-US" sz="1700" dirty="0">
                 <a:solidFill>
                   <a:srgbClr val="FFFFFF"/>
                 </a:solidFill>
@@ -9937,39 +10000,33 @@
                 <a:ea typeface="Courier New" pitchFamily="34" charset="-122"/>
                 <a:cs typeface="Courier New" pitchFamily="34" charset="-120"/>
               </a:rPr>
-              <a:t>].isna().sum())</a:t>
-            </a:r>
-            <a:endParaRPr lang="en-US" sz="2100" dirty="0"/>
-          </a:p>
-          <a:p>
-            <a:pPr algn="l" indent="0" marL="0">
-              <a:lnSpc>
-                <a:spcPts val="2730"/>
-              </a:lnSpc>
-              <a:buNone/>
-            </a:pPr>
-            <a:r>
-              <a:rPr lang="en-US" sz="2100" dirty="0">
-                <a:solidFill>
-                  <a:srgbClr val="FFFFFF"/>
+              <a:t>print(clean[</a:t>
+            </a:r>
+            <a:pPr algn="l" indent="0" marL="0">
+              <a:lnSpc>
+                <a:spcPts val="2210"/>
+              </a:lnSpc>
+              <a:buNone/>
+            </a:pPr>
+            <a:r>
+              <a:rPr lang="en-US" sz="1700" dirty="0">
+                <a:solidFill>
+                  <a:srgbClr val="E0BE36"/>
                 </a:solidFill>
                 <a:latin typeface="Courier New" pitchFamily="34" charset="0"/>
                 <a:ea typeface="Courier New" pitchFamily="34" charset="-122"/>
                 <a:cs typeface="Courier New" pitchFamily="34" charset="-120"/>
               </a:rPr>
-              <a:t>print(len(clean))</a:t>
-            </a:r>
-            <a:endParaRPr lang="en-US" sz="2100" dirty="0"/>
-          </a:p>
-          <a:p>
-            <a:pPr algn="l" indent="0" marL="0">
-              <a:lnSpc>
-                <a:spcPts val="2730"/>
-              </a:lnSpc>
-              <a:buNone/>
-            </a:pPr>
-            <a:r>
-              <a:rPr lang="en-US" sz="2100" dirty="0">
+              <a:t>"price"</a:t>
+            </a:r>
+            <a:pPr algn="l" indent="0" marL="0">
+              <a:lnSpc>
+                <a:spcPts val="2210"/>
+              </a:lnSpc>
+              <a:buNone/>
+            </a:pPr>
+            <a:r>
+              <a:rPr lang="en-US" sz="1700" dirty="0">
                 <a:solidFill>
                   <a:srgbClr val="FFFFFF"/>
                 </a:solidFill>
@@ -9977,43 +10034,9 @@
                 <a:ea typeface="Courier New" pitchFamily="34" charset="-122"/>
                 <a:cs typeface="Courier New" pitchFamily="34" charset="-120"/>
               </a:rPr>
-              <a:t>print(clean[</a:t>
-            </a:r>
-            <a:pPr algn="l" indent="0" marL="0">
-              <a:lnSpc>
-                <a:spcPts val="2730"/>
-              </a:lnSpc>
-              <a:buNone/>
-            </a:pPr>
-            <a:r>
-              <a:rPr lang="en-US" sz="2100" dirty="0">
-                <a:solidFill>
-                  <a:srgbClr val="E0BE36"/>
-                </a:solidFill>
-                <a:latin typeface="Courier New" pitchFamily="34" charset="0"/>
-                <a:ea typeface="Courier New" pitchFamily="34" charset="-122"/>
-                <a:cs typeface="Courier New" pitchFamily="34" charset="-120"/>
-              </a:rPr>
-              <a:t>"price"</a:t>
-            </a:r>
-            <a:pPr algn="l" indent="0" marL="0">
-              <a:lnSpc>
-                <a:spcPts val="2730"/>
-              </a:lnSpc>
-              <a:buNone/>
-            </a:pPr>
-            <a:r>
-              <a:rPr lang="en-US" sz="2100" dirty="0">
-                <a:solidFill>
-                  <a:srgbClr val="FFFFFF"/>
-                </a:solidFill>
-                <a:latin typeface="Courier New" pitchFamily="34" charset="0"/>
-                <a:ea typeface="Courier New" pitchFamily="34" charset="-122"/>
-                <a:cs typeface="Courier New" pitchFamily="34" charset="-120"/>
-              </a:rPr>
               <a:t>].mean())</a:t>
             </a:r>
-            <a:endParaRPr lang="en-US" sz="2100" dirty="0"/>
+            <a:endParaRPr lang="en-US" sz="1700" dirty="0"/>
           </a:p>
         </p:txBody>
       </p:sp>
@@ -10025,8 +10048,8 @@
         </p:nvSpPr>
         <p:spPr>
           <a:xfrm>
-            <a:off x="640080" y="5041392"/>
-            <a:ext cx="8046720" cy="1222248"/>
+            <a:off x="640080" y="3951732"/>
+            <a:ext cx="8046720" cy="2311908"/>
           </a:xfrm>
           <a:prstGeom prst="rect">
             <a:avLst/>
@@ -10040,7 +10063,7 @@
           <a:p>
             <a:pPr algn="l" indent="0" marL="0">
               <a:lnSpc>
-                <a:spcPts val="2760"/>
+                <a:spcPts val="3120"/>
               </a:lnSpc>
               <a:spcAft>
                 <a:spcPts val="1010"/>
@@ -10048,7 +10071,7 @@
               <a:buNone/>
             </a:pPr>
             <a:r>
-              <a:rPr lang="en-US" sz="2300" dirty="0">
+              <a:rPr lang="en-US" sz="2600" dirty="0">
                 <a:solidFill>
                   <a:srgbClr val="111111"/>
                 </a:solidFill>
@@ -10058,12 +10081,12 @@
               </a:rPr>
               <a:t>Predict how many missing prices there are and how many rows stay after the duplicate is removed.</a:t>
             </a:r>
-            <a:endParaRPr lang="en-US" sz="2300" dirty="0"/>
-          </a:p>
-          <a:p>
-            <a:pPr algn="l" indent="0" marL="0">
-              <a:lnSpc>
-                <a:spcPts val="2760"/>
+            <a:endParaRPr lang="en-US" sz="2600" dirty="0"/>
+          </a:p>
+          <a:p>
+            <a:pPr algn="l" indent="0" marL="0">
+              <a:lnSpc>
+                <a:spcPts val="3120"/>
               </a:lnSpc>
               <a:spcAft>
                 <a:spcPts val="1010"/>
@@ -10071,7 +10094,7 @@
               <a:buNone/>
             </a:pPr>
             <a:r>
-              <a:rPr lang="en-US" sz="2300" dirty="0">
+              <a:rPr lang="en-US" sz="2600" dirty="0">
                 <a:solidFill>
                   <a:srgbClr val="111111"/>
                 </a:solidFill>
@@ -10081,7 +10104,7 @@
               </a:rPr>
               <a:t>Write your guess on paper before we run it.</a:t>
             </a:r>
-            <a:endParaRPr lang="en-US" sz="2300" dirty="0"/>
+            <a:endParaRPr lang="en-US" sz="2600" dirty="0"/>
           </a:p>
         </p:txBody>
       </p:sp>
@@ -10101,7 +10124,7 @@
         </p:blipFill>
         <p:spPr>
           <a:xfrm>
-            <a:off x="10241280" y="5043678"/>
+            <a:off x="10241280" y="5031486"/>
             <a:ext cx="1188720" cy="1046988"/>
           </a:xfrm>
           <a:prstGeom prst="rect">
